--- a/ppts/Chinese_IVD_Europe_Expansion.pptx
+++ b/ppts/Chinese_IVD_Europe_Expansion.pptx
@@ -7,6 +7,19 @@
   <p:sldIdLst>
     <p:sldId id="256" r:id="rId7"/>
     <p:sldId id="257" r:id="rId8"/>
+    <p:sldId id="258" r:id="rId9"/>
+    <p:sldId id="259" r:id="rId10"/>
+    <p:sldId id="260" r:id="rId11"/>
+    <p:sldId id="261" r:id="rId12"/>
+    <p:sldId id="262" r:id="rId13"/>
+    <p:sldId id="263" r:id="rId14"/>
+    <p:sldId id="264" r:id="rId15"/>
+    <p:sldId id="265" r:id="rId16"/>
+    <p:sldId id="266" r:id="rId17"/>
+    <p:sldId id="267" r:id="rId18"/>
+    <p:sldId id="268" r:id="rId19"/>
+    <p:sldId id="269" r:id="rId20"/>
+    <p:sldId id="270" r:id="rId21"/>
   </p:sldIdLst>
   <p:sldSz cx="9144000" cy="6858000" type="screen4x3"/>
   <p:notesSz cx="6858000" cy="9144000"/>
@@ -3091,14 +3104,175 @@
       <p:grpSpPr/>
       <p:sp>
         <p:nvSpPr>
-          <p:cNvPr id="2" name="TextBox 1"/>
+          <p:cNvPr id="2" name="Title 1"/>
+          <p:cNvSpPr>
+            <a:spLocks noGrp="1"/>
+          </p:cNvSpPr>
+          <p:nvPr>
+            <p:ph type="ctrTitle"/>
+          </p:nvPr>
+        </p:nvSpPr>
+        <p:spPr/>
+        <p:txBody>
+          <a:bodyPr/>
+          <a:lstStyle/>
+          <a:p>
+            <a:r>
+              <a:t>Chinese IVD Expansion in European Markets</a:t>
+            </a:r>
+          </a:p>
+        </p:txBody>
+      </p:sp>
+      <p:sp>
+        <p:nvSpPr>
+          <p:cNvPr id="3" name="Subtitle 2"/>
+          <p:cNvSpPr>
+            <a:spLocks noGrp="1"/>
+          </p:cNvSpPr>
+          <p:nvPr>
+            <p:ph type="subTitle" idx="1"/>
+          </p:nvPr>
+        </p:nvSpPr>
+        <p:spPr/>
+        <p:txBody>
+          <a:bodyPr/>
+          <a:lstStyle/>
+          <a:p>
+            <a:r>
+              <a:t>Strategic Analysis and Market Entry Assessment</a:t>
+            </a:r>
+          </a:p>
+        </p:txBody>
+      </p:sp>
+    </p:spTree>
+  </p:cSld>
+  <p:clrMapOvr>
+    <a:masterClrMapping/>
+  </p:clrMapOvr>
+</p:sld>
+</file>
+
+<file path=ppt/slides/slide10.xml><?xml version="1.0" encoding="utf-8"?>
+<p:sld xmlns:a="http://schemas.openxmlformats.org/drawingml/2006/main" xmlns:p="http://schemas.openxmlformats.org/presentationml/2006/main" xmlns:r="http://schemas.openxmlformats.org/officeDocument/2006/relationships">
+  <p:cSld>
+    <p:spTree>
+      <p:nvGrpSpPr>
+        <p:cNvPr id="1" name=""/>
+        <p:cNvGrpSpPr/>
+        <p:nvPr/>
+      </p:nvGrpSpPr>
+      <p:grpSpPr/>
+      <p:sp>
+        <p:nvSpPr>
+          <p:cNvPr id="2" name="Title 1"/>
+          <p:cNvSpPr>
+            <a:spLocks noGrp="1"/>
+          </p:cNvSpPr>
+          <p:nvPr>
+            <p:ph type="title"/>
+          </p:nvPr>
+        </p:nvSpPr>
+        <p:spPr/>
+        <p:txBody>
+          <a:bodyPr/>
+          <a:lstStyle/>
+          <a:p>
+            <a:r>
+              <a:t>Customer Receptivity: Trust Deficit vs Cost Advantage</a:t>
+            </a:r>
+          </a:p>
+        </p:txBody>
+      </p:sp>
+      <p:sp>
+        <p:nvSpPr>
+          <p:cNvPr id="3" name="Content Placeholder 2"/>
+          <p:cNvSpPr>
+            <a:spLocks noGrp="1"/>
+          </p:cNvSpPr>
+          <p:nvPr>
+            <p:ph idx="1"/>
+          </p:nvPr>
+        </p:nvSpPr>
+        <p:spPr/>
+        <p:txBody>
+          <a:bodyPr/>
+          <a:lstStyle/>
+          <a:p>
+            <a:pPr>
+              <a:defRPr sz="1600" b="1"/>
+            </a:pPr>
+            <a:r>
+              <a:t>Adoption Challenges</a:t>
+            </a:r>
+          </a:p>
+          <a:p>
+            <a:pPr>
+              <a:defRPr sz="1400"/>
+            </a:pPr>
+            <a:r>
+              <a:t>• Low brand recognition for high-end products in developed markets</a:t>
+            </a:r>
+          </a:p>
+          <a:p>
+            <a:pPr>
+              <a:defRPr sz="1400"/>
+            </a:pPr>
+            <a:r>
+              <a:t>• Market dominated by entrenched Western incumbents (Roche, Siemens, Abbott)</a:t>
+            </a:r>
+          </a:p>
+          <a:p>
+            <a:pPr>
+              <a:defRPr sz="1400"/>
+            </a:pPr>
+            <a:r>
+              <a:t>• Trust deficit hampers adoption of high-end IVD solutions</a:t>
+            </a:r>
+          </a:p>
+          <a:p>
+            <a:pPr>
+              <a:defRPr sz="1600" b="1"/>
+            </a:pPr>
+            <a:r>
+              <a:t>Competitive Advantages</a:t>
+            </a:r>
+          </a:p>
+          <a:p>
+            <a:pPr>
+              <a:defRPr sz="1400"/>
+            </a:pPr>
+            <a:r>
+              <a:t>• Strong price competitiveness and cost-effectiveness</a:t>
+            </a:r>
+          </a:p>
+          <a:p>
+            <a:pPr>
+              <a:defRPr sz="1400"/>
+            </a:pPr>
+            <a:r>
+              <a:t>• Performance-to-cost differentiation strategy</a:t>
+            </a:r>
+          </a:p>
+          <a:p>
+            <a:pPr>
+              <a:defRPr sz="1400"/>
+            </a:pPr>
+            <a:r>
+              <a:t>• Successful adoption in price-sensitive segments and emerging markets</a:t>
+            </a:r>
+          </a:p>
+        </p:txBody>
+      </p:sp>
+      <p:sp>
+        <p:nvSpPr>
+          <p:cNvPr id="4" name="TextBox 3"/>
           <p:cNvSpPr txBox="1"/>
           <p:nvPr/>
         </p:nvSpPr>
         <p:spPr>
           <a:xfrm>
-            <a:off x="914400" y="914400"/>
-            <a:ext cx="7315200" cy="914400"/>
+            <a:off x="457200" y="5943600"/>
+            <a:ext cx="8229600" cy="914400"/>
           </a:xfrm>
           <a:prstGeom prst="rect">
             <a:avLst/>
@@ -3111,26 +3285,148 @@
           </a:bodyPr>
           <a:lstStyle/>
           <a:p>
-            <a:pPr algn="ctr"/>
-            <a:r>
-              <a:rPr sz="3200" b="1">
-                <a:latin typeface="Calibri"/>
-              </a:rPr>
-              <a:t>Expansion Potential of Chinese IVD Suppliers in Europe</a:t>
-            </a:r>
-          </a:p>
-        </p:txBody>
-      </p:sp>
-      <p:sp>
-        <p:nvSpPr>
-          <p:cNvPr id="3" name="TextBox 2"/>
+            <a:pPr>
+              <a:defRPr sz="800">
+                <a:solidFill>
+                  <a:srgbClr val="646464"/>
+                </a:solidFill>
+              </a:defRPr>
+            </a:pPr>
+            <a:r>
+              <a:t>[1] https://drive.google.com/file/d/1zt3vNjOlugypsvPkywduyWNRPGTHrsoj/view?usp=drive_link [2] https://en.caclp.com/industry-news/2365.html</a:t>
+            </a:r>
+          </a:p>
+        </p:txBody>
+      </p:sp>
+    </p:spTree>
+  </p:cSld>
+  <p:clrMapOvr>
+    <a:masterClrMapping/>
+  </p:clrMapOvr>
+</p:sld>
+</file>
+
+<file path=ppt/slides/slide11.xml><?xml version="1.0" encoding="utf-8"?>
+<p:sld xmlns:a="http://schemas.openxmlformats.org/drawingml/2006/main" xmlns:p="http://schemas.openxmlformats.org/presentationml/2006/main" xmlns:r="http://schemas.openxmlformats.org/officeDocument/2006/relationships">
+  <p:cSld>
+    <p:spTree>
+      <p:nvGrpSpPr>
+        <p:cNvPr id="1" name=""/>
+        <p:cNvGrpSpPr/>
+        <p:nvPr/>
+      </p:nvGrpSpPr>
+      <p:grpSpPr/>
+      <p:sp>
+        <p:nvSpPr>
+          <p:cNvPr id="2" name="Title 1"/>
+          <p:cNvSpPr>
+            <a:spLocks noGrp="1"/>
+          </p:cNvSpPr>
+          <p:nvPr>
+            <p:ph type="title"/>
+          </p:nvPr>
+        </p:nvSpPr>
+        <p:spPr/>
+        <p:txBody>
+          <a:bodyPr/>
+          <a:lstStyle/>
+          <a:p>
+            <a:r>
+              <a:t>Strategic Opportunities: Pathways to Market Success</a:t>
+            </a:r>
+          </a:p>
+        </p:txBody>
+      </p:sp>
+      <p:sp>
+        <p:nvSpPr>
+          <p:cNvPr id="3" name="Content Placeholder 2"/>
+          <p:cNvSpPr>
+            <a:spLocks noGrp="1"/>
+          </p:cNvSpPr>
+          <p:nvPr>
+            <p:ph idx="1"/>
+          </p:nvPr>
+        </p:nvSpPr>
+        <p:spPr/>
+        <p:txBody>
+          <a:bodyPr/>
+          <a:lstStyle/>
+          <a:p>
+            <a:pPr>
+              <a:defRPr sz="1600" b="1"/>
+            </a:pPr>
+            <a:r>
+              <a:t>Market Entry Strategies</a:t>
+            </a:r>
+          </a:p>
+          <a:p>
+            <a:pPr>
+              <a:defRPr sz="1400"/>
+            </a:pPr>
+            <a:r>
+              <a:t>• Utilize Eastern European countries (Hungary, Greece) as gateways to EU market</a:t>
+            </a:r>
+          </a:p>
+          <a:p>
+            <a:pPr>
+              <a:defRPr sz="1400"/>
+            </a:pPr>
+            <a:r>
+              <a:t>• Leverage German certification for enhanced brand credibility</a:t>
+            </a:r>
+          </a:p>
+          <a:p>
+            <a:pPr>
+              <a:defRPr sz="1400"/>
+            </a:pPr>
+            <a:r>
+              <a:t>• Focus on POCT and decentralized testing segments</a:t>
+            </a:r>
+          </a:p>
+          <a:p>
+            <a:pPr>
+              <a:defRPr sz="1600" b="1"/>
+            </a:pPr>
+            <a:r>
+              <a:t>Strategic Partnerships &amp; Acquisitions</a:t>
+            </a:r>
+          </a:p>
+          <a:p>
+            <a:pPr>
+              <a:defRPr sz="1400"/>
+            </a:pPr>
+            <a:r>
+              <a:t>• Acquire European companies for local presence (Mindray-DiaSys model)</a:t>
+            </a:r>
+          </a:p>
+          <a:p>
+            <a:pPr>
+              <a:defRPr sz="1400"/>
+            </a:pPr>
+            <a:r>
+              <a:t>• Secure upstream raw materials through acquisitions (HyTest strategy)</a:t>
+            </a:r>
+          </a:p>
+          <a:p>
+            <a:pPr>
+              <a:defRPr sz="1400"/>
+            </a:pPr>
+            <a:r>
+              <a:t>• Establish local manufacturing to bypass IPI restrictions</a:t>
+            </a:r>
+          </a:p>
+        </p:txBody>
+      </p:sp>
+      <p:sp>
+        <p:nvSpPr>
+          <p:cNvPr id="4" name="TextBox 3"/>
           <p:cNvSpPr txBox="1"/>
           <p:nvPr/>
         </p:nvSpPr>
         <p:spPr>
           <a:xfrm>
-            <a:off x="914400" y="2011680"/>
-            <a:ext cx="7315200" cy="548640"/>
+            <a:off x="457200" y="5943600"/>
+            <a:ext cx="8229600" cy="914400"/>
           </a:xfrm>
           <a:prstGeom prst="rect">
             <a:avLst/>
@@ -3143,26 +3439,303 @@
           </a:bodyPr>
           <a:lstStyle/>
           <a:p>
-            <a:pPr algn="ctr"/>
-            <a:r>
-              <a:rPr sz="2000" b="0">
-                <a:latin typeface="Calibri"/>
-              </a:rPr>
-              <a:t>Strategic Assessment – Senior Strategic Analyst, Global Diagnostics</a:t>
-            </a:r>
-          </a:p>
-        </p:txBody>
-      </p:sp>
-      <p:sp>
-        <p:nvSpPr>
-          <p:cNvPr id="4" name="TextBox 3"/>
+            <a:pPr>
+              <a:defRPr sz="800">
+                <a:solidFill>
+                  <a:srgbClr val="646464"/>
+                </a:solidFill>
+              </a:defRPr>
+            </a:pPr>
+            <a:r>
+              <a:t>[1] https://drive.google.com/file/d/1zt3vNjOlugypsvPkywduyWNRPGTHrsoj/view?usp=drive_link [2] https://hytest.fi/news/mindray-completes-acquisition-of-hytest</a:t>
+            </a:r>
+          </a:p>
+        </p:txBody>
+      </p:sp>
+    </p:spTree>
+  </p:cSld>
+  <p:clrMapOvr>
+    <a:masterClrMapping/>
+  </p:clrMapOvr>
+</p:sld>
+</file>
+
+<file path=ppt/slides/slide12.xml><?xml version="1.0" encoding="utf-8"?>
+<p:sld xmlns:a="http://schemas.openxmlformats.org/drawingml/2006/main" xmlns:p="http://schemas.openxmlformats.org/presentationml/2006/main" xmlns:r="http://schemas.openxmlformats.org/officeDocument/2006/relationships">
+  <p:cSld>
+    <p:spTree>
+      <p:nvGrpSpPr>
+        <p:cNvPr id="1" name=""/>
+        <p:cNvGrpSpPr/>
+        <p:nvPr/>
+      </p:nvGrpSpPr>
+      <p:grpSpPr/>
+      <p:sp>
+        <p:nvSpPr>
+          <p:cNvPr id="2" name="Title 1"/>
+          <p:cNvSpPr>
+            <a:spLocks noGrp="1"/>
+          </p:cNvSpPr>
+          <p:nvPr>
+            <p:ph type="title"/>
+          </p:nvPr>
+        </p:nvSpPr>
+        <p:spPr/>
+        <p:txBody>
+          <a:bodyPr/>
+          <a:lstStyle/>
+          <a:p>
+            <a:r>
+              <a:t>Risks &amp; Challenges: Navigating Complex Barriers</a:t>
+            </a:r>
+          </a:p>
+        </p:txBody>
+      </p:sp>
+      <p:sp>
+        <p:nvSpPr>
+          <p:cNvPr id="3" name="Content Placeholder 2"/>
+          <p:cNvSpPr>
+            <a:spLocks noGrp="1"/>
+          </p:cNvSpPr>
+          <p:nvPr>
+            <p:ph idx="1"/>
+          </p:nvPr>
+        </p:nvSpPr>
+        <p:spPr/>
+        <p:txBody>
+          <a:bodyPr/>
+          <a:lstStyle/>
+          <a:p/>
+        </p:txBody>
+      </p:sp>
+      <p:graphicFrame>
+        <p:nvGraphicFramePr>
+          <p:cNvPr id="4" name="Table 3"/>
+          <p:cNvGraphicFramePr>
+            <a:graphicFrameLocks noGrp="1"/>
+          </p:cNvGraphicFramePr>
+          <p:nvPr/>
+        </p:nvGraphicFramePr>
+        <p:xfrm>
+          <a:off x="457200" y="1371600"/>
+          <a:ext cx="8229600" cy="3657600"/>
+        </p:xfrm>
+        <a:graphic>
+          <a:graphicData uri="http://schemas.openxmlformats.org/drawingml/2006/table">
+            <a:tbl>
+              <a:tblPr firstRow="1" bandRow="1">
+                <a:tableStyleId>{5C22544A-7EE6-4342-B048-85BDC9FD1C3A}</a:tableStyleId>
+              </a:tblPr>
+              <a:tblGrid>
+                <a:gridCol w="4114800"/>
+                <a:gridCol w="4114800"/>
+              </a:tblGrid>
+              <a:tr h="609600">
+                <a:tc>
+                  <a:txBody>
+                    <a:bodyPr/>
+                    <a:lstStyle/>
+                    <a:p>
+                      <a:pPr algn="l">
+                        <a:defRPr sz="1000"/>
+                      </a:pPr>
+                      <a:r>
+                        <a:t>Risk Category</a:t>
+                      </a:r>
+                    </a:p>
+                  </a:txBody>
+                  <a:tcPr/>
+                </a:tc>
+                <a:tc>
+                  <a:txBody>
+                    <a:bodyPr/>
+                    <a:lstStyle/>
+                    <a:p>
+                      <a:pPr algn="l">
+                        <a:defRPr sz="1000"/>
+                      </a:pPr>
+                      <a:r>
+                        <a:t>Specific Challenges</a:t>
+                      </a:r>
+                    </a:p>
+                  </a:txBody>
+                  <a:tcPr/>
+                </a:tc>
+              </a:tr>
+              <a:tr h="609600">
+                <a:tc>
+                  <a:txBody>
+                    <a:bodyPr/>
+                    <a:lstStyle/>
+                    <a:p>
+                      <a:pPr algn="l">
+                        <a:defRPr sz="1000"/>
+                      </a:pPr>
+                      <a:r>
+                        <a:t>Regulatory</a:t>
+                      </a:r>
+                    </a:p>
+                  </a:txBody>
+                  <a:tcPr/>
+                </a:tc>
+                <a:tc>
+                  <a:txBody>
+                    <a:bodyPr/>
+                    <a:lstStyle/>
+                    <a:p>
+                      <a:pPr algn="l">
+                        <a:defRPr sz="1000"/>
+                      </a:pPr>
+                      <a:r>
+                        <a:t>IVDR compliance costs, IPI restrictions, REACH environmental rules</a:t>
+                      </a:r>
+                    </a:p>
+                  </a:txBody>
+                  <a:tcPr/>
+                </a:tc>
+              </a:tr>
+              <a:tr h="609600">
+                <a:tc>
+                  <a:txBody>
+                    <a:bodyPr/>
+                    <a:lstStyle/>
+                    <a:p>
+                      <a:pPr algn="l">
+                        <a:defRPr sz="1000"/>
+                      </a:pPr>
+                      <a:r>
+                        <a:t>Market Access</a:t>
+                      </a:r>
+                    </a:p>
+                  </a:txBody>
+                  <a:tcPr/>
+                </a:tc>
+                <a:tc>
+                  <a:txBody>
+                    <a:bodyPr/>
+                    <a:lstStyle/>
+                    <a:p>
+                      <a:pPr algn="l">
+                        <a:defRPr sz="1000"/>
+                      </a:pPr>
+                      <a:r>
+                        <a:t>Country-specific reimbursement systems, HTA requirements</a:t>
+                      </a:r>
+                    </a:p>
+                  </a:txBody>
+                  <a:tcPr/>
+                </a:tc>
+              </a:tr>
+              <a:tr h="609600">
+                <a:tc>
+                  <a:txBody>
+                    <a:bodyPr/>
+                    <a:lstStyle/>
+                    <a:p>
+                      <a:pPr algn="l">
+                        <a:defRPr sz="1000"/>
+                      </a:pPr>
+                      <a:r>
+                        <a:t>Competitive</a:t>
+                      </a:r>
+                    </a:p>
+                  </a:txBody>
+                  <a:tcPr/>
+                </a:tc>
+                <a:tc>
+                  <a:txBody>
+                    <a:bodyPr/>
+                    <a:lstStyle/>
+                    <a:p>
+                      <a:pPr algn="l">
+                        <a:defRPr sz="1000"/>
+                      </a:pPr>
+                      <a:r>
+                        <a:t>Entrenched incumbents, trust deficit in high-end segments</a:t>
+                      </a:r>
+                    </a:p>
+                  </a:txBody>
+                  <a:tcPr/>
+                </a:tc>
+              </a:tr>
+              <a:tr h="609600">
+                <a:tc>
+                  <a:txBody>
+                    <a:bodyPr/>
+                    <a:lstStyle/>
+                    <a:p>
+                      <a:pPr algn="l">
+                        <a:defRPr sz="1000"/>
+                      </a:pPr>
+                      <a:r>
+                        <a:t>Operational</a:t>
+                      </a:r>
+                    </a:p>
+                  </a:txBody>
+                  <a:tcPr/>
+                </a:tc>
+                <a:tc>
+                  <a:txBody>
+                    <a:bodyPr/>
+                    <a:lstStyle/>
+                    <a:p>
+                      <a:pPr algn="l">
+                        <a:defRPr sz="1000"/>
+                      </a:pPr>
+                      <a:r>
+                        <a:t>Supply chain localization requirements, skilled workforce shortages</a:t>
+                      </a:r>
+                    </a:p>
+                  </a:txBody>
+                  <a:tcPr/>
+                </a:tc>
+              </a:tr>
+              <a:tr h="609600">
+                <a:tc>
+                  <a:txBody>
+                    <a:bodyPr/>
+                    <a:lstStyle/>
+                    <a:p>
+                      <a:pPr algn="l">
+                        <a:defRPr sz="1000"/>
+                      </a:pPr>
+                      <a:r>
+                        <a:t>Geopolitical</a:t>
+                      </a:r>
+                    </a:p>
+                  </a:txBody>
+                  <a:tcPr/>
+                </a:tc>
+                <a:tc>
+                  <a:txBody>
+                    <a:bodyPr/>
+                    <a:lstStyle/>
+                    <a:p>
+                      <a:pPr algn="l">
+                        <a:defRPr sz="1000"/>
+                      </a:pPr>
+                      <a:r>
+                        <a:t>Trade tensions, reciprocity requirements, policy changes</a:t>
+                      </a:r>
+                    </a:p>
+                  </a:txBody>
+                  <a:tcPr/>
+                </a:tc>
+              </a:tr>
+            </a:tbl>
+          </a:graphicData>
+        </a:graphic>
+      </p:graphicFrame>
+      <p:sp>
+        <p:nvSpPr>
+          <p:cNvPr id="5" name="TextBox 4"/>
           <p:cNvSpPr txBox="1"/>
           <p:nvPr/>
         </p:nvSpPr>
         <p:spPr>
           <a:xfrm>
-            <a:off x="914400" y="6400800"/>
-            <a:ext cx="7315200" cy="457200"/>
+            <a:off x="457200" y="5486400"/>
+            <a:ext cx="8229600" cy="914400"/>
           </a:xfrm>
           <a:prstGeom prst="rect">
             <a:avLst/>
@@ -3175,12 +3748,438 @@
           </a:bodyPr>
           <a:lstStyle/>
           <a:p>
-            <a:pPr algn="ctr"/>
-            <a:r>
-              <a:rPr sz="1200" b="0">
-                <a:latin typeface="Calibri"/>
-              </a:rPr>
-              <a:t>April 16, 2026</a:t>
+            <a:pPr>
+              <a:defRPr sz="800">
+                <a:solidFill>
+                  <a:srgbClr val="646464"/>
+                </a:solidFill>
+              </a:defRPr>
+            </a:pPr>
+            <a:r>
+              <a:t>[1] https://ec.europa.eu/commission/presscorner/detail/en/ip_25_1569 [2] https://mtrconsult.com/general-market-access-landscape-vitro-diagnostic-tests-europe</a:t>
+            </a:r>
+          </a:p>
+        </p:txBody>
+      </p:sp>
+    </p:spTree>
+  </p:cSld>
+  <p:clrMapOvr>
+    <a:masterClrMapping/>
+  </p:clrMapOvr>
+</p:sld>
+</file>
+
+<file path=ppt/slides/slide13.xml><?xml version="1.0" encoding="utf-8"?>
+<p:sld xmlns:a="http://schemas.openxmlformats.org/drawingml/2006/main" xmlns:p="http://schemas.openxmlformats.org/presentationml/2006/main" xmlns:r="http://schemas.openxmlformats.org/officeDocument/2006/relationships">
+  <p:cSld>
+    <p:spTree>
+      <p:nvGrpSpPr>
+        <p:cNvPr id="1" name=""/>
+        <p:cNvGrpSpPr/>
+        <p:nvPr/>
+      </p:nvGrpSpPr>
+      <p:grpSpPr/>
+      <p:sp>
+        <p:nvSpPr>
+          <p:cNvPr id="2" name="Title 1"/>
+          <p:cNvSpPr>
+            <a:spLocks noGrp="1"/>
+          </p:cNvSpPr>
+          <p:nvPr>
+            <p:ph type="title"/>
+          </p:nvPr>
+        </p:nvSpPr>
+        <p:spPr/>
+        <p:txBody>
+          <a:bodyPr/>
+          <a:lstStyle/>
+          <a:p>
+            <a:r>
+              <a:t>Financial Performance: Export-Focused Companies Outperforming</a:t>
+            </a:r>
+          </a:p>
+        </p:txBody>
+      </p:sp>
+      <p:sp>
+        <p:nvSpPr>
+          <p:cNvPr id="3" name="Content Placeholder 2"/>
+          <p:cNvSpPr>
+            <a:spLocks noGrp="1"/>
+          </p:cNvSpPr>
+          <p:nvPr>
+            <p:ph idx="1"/>
+          </p:nvPr>
+        </p:nvSpPr>
+        <p:spPr/>
+        <p:txBody>
+          <a:bodyPr/>
+          <a:lstStyle/>
+          <a:p/>
+        </p:txBody>
+      </p:sp>
+      <p:pic>
+        <p:nvPicPr>
+          <p:cNvPr id="4" name="Picture 3" descr="image.png"/>
+          <p:cNvPicPr>
+            <a:picLocks noChangeAspect="1"/>
+          </p:cNvPicPr>
+          <p:nvPr/>
+        </p:nvPicPr>
+        <p:blipFill>
+          <a:blip r:embed="rId2"/>
+          <a:stretch>
+            <a:fillRect/>
+          </a:stretch>
+        </p:blipFill>
+        <p:spPr>
+          <a:xfrm>
+            <a:off x="914400" y="1371600"/>
+            <a:ext cx="7315200" cy="4572000"/>
+          </a:xfrm>
+          <a:prstGeom prst="rect">
+            <a:avLst/>
+          </a:prstGeom>
+        </p:spPr>
+      </p:pic>
+      <p:sp>
+        <p:nvSpPr>
+          <p:cNvPr id="5" name="TextBox 4"/>
+          <p:cNvSpPr txBox="1"/>
+          <p:nvPr/>
+        </p:nvSpPr>
+        <p:spPr>
+          <a:xfrm>
+            <a:off x="457200" y="5943600"/>
+            <a:ext cx="8229600" cy="914400"/>
+          </a:xfrm>
+          <a:prstGeom prst="rect">
+            <a:avLst/>
+          </a:prstGeom>
+          <a:noFill/>
+        </p:spPr>
+        <p:txBody>
+          <a:bodyPr wrap="none">
+            <a:spAutoFit/>
+          </a:bodyPr>
+          <a:lstStyle/>
+          <a:p>
+            <a:pPr>
+              <a:defRPr sz="800">
+                <a:solidFill>
+                  <a:srgbClr val="646464"/>
+                </a:solidFill>
+              </a:defRPr>
+            </a:pPr>
+            <a:r>
+              <a:t>[1] https://en.caclp.com/industry-news/2808.html [2] https://en.caclp.com/industry-news/2785.html</a:t>
+            </a:r>
+          </a:p>
+        </p:txBody>
+      </p:sp>
+    </p:spTree>
+  </p:cSld>
+  <p:clrMapOvr>
+    <a:masterClrMapping/>
+  </p:clrMapOvr>
+</p:sld>
+</file>
+
+<file path=ppt/slides/slide14.xml><?xml version="1.0" encoding="utf-8"?>
+<p:sld xmlns:a="http://schemas.openxmlformats.org/drawingml/2006/main" xmlns:p="http://schemas.openxmlformats.org/presentationml/2006/main" xmlns:r="http://schemas.openxmlformats.org/officeDocument/2006/relationships">
+  <p:cSld>
+    <p:spTree>
+      <p:nvGrpSpPr>
+        <p:cNvPr id="1" name=""/>
+        <p:cNvGrpSpPr/>
+        <p:nvPr/>
+      </p:nvGrpSpPr>
+      <p:grpSpPr/>
+      <p:sp>
+        <p:nvSpPr>
+          <p:cNvPr id="2" name="Title 1"/>
+          <p:cNvSpPr>
+            <a:spLocks noGrp="1"/>
+          </p:cNvSpPr>
+          <p:nvPr>
+            <p:ph type="title"/>
+          </p:nvPr>
+        </p:nvSpPr>
+        <p:spPr/>
+        <p:txBody>
+          <a:bodyPr/>
+          <a:lstStyle/>
+          <a:p>
+            <a:r>
+              <a:t>Strategic Recommendations for Market Entry</a:t>
+            </a:r>
+          </a:p>
+        </p:txBody>
+      </p:sp>
+      <p:sp>
+        <p:nvSpPr>
+          <p:cNvPr id="3" name="Content Placeholder 2"/>
+          <p:cNvSpPr>
+            <a:spLocks noGrp="1"/>
+          </p:cNvSpPr>
+          <p:nvPr>
+            <p:ph idx="1"/>
+          </p:nvPr>
+        </p:nvSpPr>
+        <p:spPr/>
+        <p:txBody>
+          <a:bodyPr/>
+          <a:lstStyle/>
+          <a:p>
+            <a:pPr>
+              <a:defRPr sz="1600" b="1"/>
+            </a:pPr>
+            <a:r>
+              <a:t>Immediate Priorities (0-12 months)</a:t>
+            </a:r>
+          </a:p>
+          <a:p>
+            <a:pPr>
+              <a:defRPr sz="1400"/>
+            </a:pPr>
+            <a:r>
+              <a:t>• Establish local EU manufacturing/JVs to bypass IPI restrictions</a:t>
+            </a:r>
+          </a:p>
+          <a:p>
+            <a:pPr>
+              <a:defRPr sz="1400"/>
+            </a:pPr>
+            <a:r>
+              <a:t>• Secure full IVDR certification for complete product portfolios</a:t>
+            </a:r>
+          </a:p>
+          <a:p>
+            <a:pPr>
+              <a:defRPr sz="1400"/>
+            </a:pPr>
+            <a:r>
+              <a:t>• Develop country-specific HTA and reimbursement dossiers</a:t>
+            </a:r>
+          </a:p>
+          <a:p>
+            <a:pPr>
+              <a:defRPr sz="1600" b="1"/>
+            </a:pPr>
+            <a:r>
+              <a:t>Medium-Term Strategy (1-3 years)</a:t>
+            </a:r>
+          </a:p>
+          <a:p>
+            <a:pPr>
+              <a:defRPr sz="1400"/>
+            </a:pPr>
+            <a:r>
+              <a:t>• Acquire European distributors or establish direct sales force</a:t>
+            </a:r>
+          </a:p>
+          <a:p>
+            <a:pPr>
+              <a:defRPr sz="1400"/>
+            </a:pPr>
+            <a:r>
+              <a:t>• Build local service and support capabilities across key markets</a:t>
+            </a:r>
+          </a:p>
+          <a:p>
+            <a:pPr>
+              <a:defRPr sz="1400"/>
+            </a:pPr>
+            <a:r>
+              <a:t>• Develop innovative payment models for cost-constrained systems</a:t>
+            </a:r>
+          </a:p>
+        </p:txBody>
+      </p:sp>
+      <p:sp>
+        <p:nvSpPr>
+          <p:cNvPr id="4" name="TextBox 3"/>
+          <p:cNvSpPr txBox="1"/>
+          <p:nvPr/>
+        </p:nvSpPr>
+        <p:spPr>
+          <a:xfrm>
+            <a:off x="457200" y="5943600"/>
+            <a:ext cx="8229600" cy="914400"/>
+          </a:xfrm>
+          <a:prstGeom prst="rect">
+            <a:avLst/>
+          </a:prstGeom>
+          <a:noFill/>
+        </p:spPr>
+        <p:txBody>
+          <a:bodyPr wrap="none">
+            <a:spAutoFit/>
+          </a:bodyPr>
+          <a:lstStyle/>
+          <a:p>
+            <a:pPr>
+              <a:defRPr sz="800">
+                <a:solidFill>
+                  <a:srgbClr val="646464"/>
+                </a:solidFill>
+              </a:defRPr>
+            </a:pPr>
+            <a:r>
+              <a:t>[1] https://www.ainvest.com/news/frontier-medtech-navigating-china-eu-trade-tensions-investment-gains-2507/ [2] https://mtrconsult.com/general-market-access-landscape-vitro-diagnostic-tests-europe</a:t>
+            </a:r>
+          </a:p>
+        </p:txBody>
+      </p:sp>
+    </p:spTree>
+  </p:cSld>
+  <p:clrMapOvr>
+    <a:masterClrMapping/>
+  </p:clrMapOvr>
+</p:sld>
+</file>
+
+<file path=ppt/slides/slide15.xml><?xml version="1.0" encoding="utf-8"?>
+<p:sld xmlns:a="http://schemas.openxmlformats.org/drawingml/2006/main" xmlns:p="http://schemas.openxmlformats.org/presentationml/2006/main" xmlns:r="http://schemas.openxmlformats.org/officeDocument/2006/relationships">
+  <p:cSld>
+    <p:spTree>
+      <p:nvGrpSpPr>
+        <p:cNvPr id="1" name=""/>
+        <p:cNvGrpSpPr/>
+        <p:nvPr/>
+      </p:nvGrpSpPr>
+      <p:grpSpPr/>
+      <p:sp>
+        <p:nvSpPr>
+          <p:cNvPr id="2" name="Title 1"/>
+          <p:cNvSpPr>
+            <a:spLocks noGrp="1"/>
+          </p:cNvSpPr>
+          <p:nvPr>
+            <p:ph type="title"/>
+          </p:nvPr>
+        </p:nvSpPr>
+        <p:spPr/>
+        <p:txBody>
+          <a:bodyPr/>
+          <a:lstStyle/>
+          <a:p>
+            <a:r>
+              <a:t>Conclusion: Strategic Imperatives for European Success</a:t>
+            </a:r>
+          </a:p>
+        </p:txBody>
+      </p:sp>
+      <p:sp>
+        <p:nvSpPr>
+          <p:cNvPr id="3" name="Content Placeholder 2"/>
+          <p:cNvSpPr>
+            <a:spLocks noGrp="1"/>
+          </p:cNvSpPr>
+          <p:nvPr>
+            <p:ph idx="1"/>
+          </p:nvPr>
+        </p:nvSpPr>
+        <p:spPr/>
+        <p:txBody>
+          <a:bodyPr/>
+          <a:lstStyle/>
+          <a:p>
+            <a:pPr>
+              <a:defRPr sz="1600" b="1"/>
+            </a:pPr>
+            <a:r>
+              <a:t>Key Success Factors</a:t>
+            </a:r>
+          </a:p>
+          <a:p>
+            <a:pPr>
+              <a:defRPr sz="1400"/>
+            </a:pPr>
+            <a:r>
+              <a:t>• Localization is non-negotiable: manufacturing, service, and compliance</a:t>
+            </a:r>
+          </a:p>
+          <a:p>
+            <a:pPr>
+              <a:defRPr sz="1400"/>
+            </a:pPr>
+            <a:r>
+              <a:t>• Focus on cost-advantaged segments while building high-end credibility</a:t>
+            </a:r>
+          </a:p>
+          <a:p>
+            <a:pPr>
+              <a:defRPr sz="1400"/>
+            </a:pPr>
+            <a:r>
+              <a:t>• Navigate country-specific reimbursement systems with tailored strategies</a:t>
+            </a:r>
+          </a:p>
+          <a:p>
+            <a:pPr>
+              <a:defRPr sz="1600" b="1"/>
+            </a:pPr>
+            <a:r>
+              <a:t>Future Outlook</a:t>
+            </a:r>
+          </a:p>
+          <a:p>
+            <a:pPr>
+              <a:defRPr sz="1400"/>
+            </a:pPr>
+            <a:r>
+              <a:t>• Chinese suppliers well-positioned for mid-market segments</a:t>
+            </a:r>
+          </a:p>
+          <a:p>
+            <a:pPr>
+              <a:defRPr sz="1400"/>
+            </a:pPr>
+            <a:r>
+              <a:t>• Regulatory compliance becoming key differentiator</a:t>
+            </a:r>
+          </a:p>
+          <a:p>
+            <a:pPr>
+              <a:defRPr sz="1400"/>
+            </a:pPr>
+            <a:r>
+              <a:t>• Market share gains expected in cost-sensitive segments</a:t>
+            </a:r>
+          </a:p>
+        </p:txBody>
+      </p:sp>
+      <p:sp>
+        <p:nvSpPr>
+          <p:cNvPr id="4" name="TextBox 3"/>
+          <p:cNvSpPr txBox="1"/>
+          <p:nvPr/>
+        </p:nvSpPr>
+        <p:spPr>
+          <a:xfrm>
+            <a:off x="457200" y="5943600"/>
+            <a:ext cx="8229600" cy="914400"/>
+          </a:xfrm>
+          <a:prstGeom prst="rect">
+            <a:avLst/>
+          </a:prstGeom>
+          <a:noFill/>
+        </p:spPr>
+        <p:txBody>
+          <a:bodyPr wrap="none">
+            <a:spAutoFit/>
+          </a:bodyPr>
+          <a:lstStyle/>
+          <a:p>
+            <a:pPr>
+              <a:defRPr sz="800">
+                <a:solidFill>
+                  <a:srgbClr val="646464"/>
+                </a:solidFill>
+              </a:defRPr>
+            </a:pPr>
+            <a:r>
+              <a:t>[1] https://drive.google.com/file/d/1zt3vNjOlugypsvPkywduyWNRPGTHrsoj/view?usp=drive_link [2] https://www.ainvest.com/news/frontier-medtech-navigating-china-eu-trade-tensions-investment-gains-2507/</a:t>
             </a:r>
           </a:p>
         </p:txBody>
@@ -3205,14 +4204,91 @@
       <p:grpSpPr/>
       <p:sp>
         <p:nvSpPr>
-          <p:cNvPr id="2" name="TextBox 1"/>
+          <p:cNvPr id="2" name="Title 1"/>
+          <p:cNvSpPr>
+            <a:spLocks noGrp="1"/>
+          </p:cNvSpPr>
+          <p:nvPr>
+            <p:ph type="title"/>
+          </p:nvPr>
+        </p:nvSpPr>
+        <p:spPr/>
+        <p:txBody>
+          <a:bodyPr/>
+          <a:lstStyle/>
+          <a:p>
+            <a:r>
+              <a:t>Executive Summary: High-Value Market with Significant Barriers</a:t>
+            </a:r>
+          </a:p>
+        </p:txBody>
+      </p:sp>
+      <p:sp>
+        <p:nvSpPr>
+          <p:cNvPr id="3" name="Content Placeholder 2"/>
+          <p:cNvSpPr>
+            <a:spLocks noGrp="1"/>
+          </p:cNvSpPr>
+          <p:nvPr>
+            <p:ph idx="1"/>
+          </p:nvPr>
+        </p:nvSpPr>
+        <p:spPr/>
+        <p:txBody>
+          <a:bodyPr/>
+          <a:lstStyle/>
+          <a:p>
+            <a:pPr>
+              <a:defRPr sz="1400" b="1"/>
+            </a:pPr>
+            <a:r>
+              <a:t>• European IVD market represents €12.9B+ opportunity with substantial government-funded healthcare spending</a:t>
+            </a:r>
+          </a:p>
+          <a:p>
+            <a:pPr>
+              <a:defRPr sz="1400"/>
+            </a:pPr>
+            <a:r>
+              <a:t>• Chinese suppliers face complex regulatory barriers (IVDR transition) and new procurement restrictions (IPI)</a:t>
+            </a:r>
+          </a:p>
+          <a:p>
+            <a:pPr>
+              <a:defRPr sz="1400"/>
+            </a:pPr>
+            <a:r>
+              <a:t>• Leading Chinese players (Mindray, Snibe, Autobio) demonstrate regulatory compliance and financial strength</a:t>
+            </a:r>
+          </a:p>
+          <a:p>
+            <a:pPr>
+              <a:defRPr sz="1400"/>
+            </a:pPr>
+            <a:r>
+              <a:t>• Market entry requires localization strategy, navigating country-specific reimbursement systems, and overcoming trust deficit</a:t>
+            </a:r>
+          </a:p>
+          <a:p>
+            <a:pPr>
+              <a:defRPr sz="1400"/>
+            </a:pPr>
+            <a:r>
+              <a:t>• Strategic acquisitions and partnerships critical for European market penetration</a:t>
+            </a:r>
+          </a:p>
+        </p:txBody>
+      </p:sp>
+      <p:sp>
+        <p:nvSpPr>
+          <p:cNvPr id="4" name="TextBox 3"/>
           <p:cNvSpPr txBox="1"/>
           <p:nvPr/>
         </p:nvSpPr>
         <p:spPr>
           <a:xfrm>
-            <a:off x="457200" y="274320"/>
-            <a:ext cx="8229600" cy="548640"/>
+            <a:off x="457200" y="5943600"/>
+            <a:ext cx="8229600" cy="914400"/>
           </a:xfrm>
           <a:prstGeom prst="rect">
             <a:avLst/>
@@ -3225,26 +4301,260 @@
           </a:bodyPr>
           <a:lstStyle/>
           <a:p>
-            <a:pPr algn="l"/>
-            <a:r>
-              <a:rPr sz="2800" b="1">
-                <a:latin typeface="Calibri"/>
-              </a:rPr>
-              <a:t>Key Market Insights</a:t>
-            </a:r>
-          </a:p>
-        </p:txBody>
-      </p:sp>
-      <p:sp>
-        <p:nvSpPr>
-          <p:cNvPr id="3" name="TextBox 2"/>
+            <a:pPr>
+              <a:defRPr sz="800">
+                <a:solidFill>
+                  <a:srgbClr val="646464"/>
+                </a:solidFill>
+              </a:defRPr>
+            </a:pPr>
+            <a:r>
+              <a:t>[1] https://drive.google.com/file/d/1zt3vNjOlugypsvPkywduyWNRPGTHrsoj/view?usp=drive_link</a:t>
+            </a:r>
+          </a:p>
+        </p:txBody>
+      </p:sp>
+    </p:spTree>
+  </p:cSld>
+  <p:clrMapOvr>
+    <a:masterClrMapping/>
+  </p:clrMapOvr>
+</p:sld>
+</file>
+
+<file path=ppt/slides/slide3.xml><?xml version="1.0" encoding="utf-8"?>
+<p:sld xmlns:a="http://schemas.openxmlformats.org/drawingml/2006/main" xmlns:p="http://schemas.openxmlformats.org/presentationml/2006/main" xmlns:r="http://schemas.openxmlformats.org/officeDocument/2006/relationships">
+  <p:cSld>
+    <p:spTree>
+      <p:nvGrpSpPr>
+        <p:cNvPr id="1" name=""/>
+        <p:cNvGrpSpPr/>
+        <p:nvPr/>
+      </p:nvGrpSpPr>
+      <p:grpSpPr/>
+      <p:sp>
+        <p:nvSpPr>
+          <p:cNvPr id="2" name="Title 1"/>
+          <p:cNvSpPr>
+            <a:spLocks noGrp="1"/>
+          </p:cNvSpPr>
+          <p:nvPr>
+            <p:ph type="title"/>
+          </p:nvPr>
+        </p:nvSpPr>
+        <p:spPr/>
+        <p:txBody>
+          <a:bodyPr/>
+          <a:lstStyle/>
+          <a:p>
+            <a:r>
+              <a:t>Agenda</a:t>
+            </a:r>
+          </a:p>
+        </p:txBody>
+      </p:sp>
+      <p:sp>
+        <p:nvSpPr>
+          <p:cNvPr id="3" name="Content Placeholder 2"/>
+          <p:cNvSpPr>
+            <a:spLocks noGrp="1"/>
+          </p:cNvSpPr>
+          <p:nvPr>
+            <p:ph idx="1"/>
+          </p:nvPr>
+        </p:nvSpPr>
+        <p:spPr/>
+        <p:txBody>
+          <a:bodyPr/>
+          <a:lstStyle/>
+          <a:p/>
+          <a:p>
+            <a:pPr>
+              <a:defRPr sz="1600"/>
+            </a:pPr>
+            <a:r>
+              <a:t>Market Overview &amp; Key Metrics</a:t>
+            </a:r>
+          </a:p>
+          <a:p>
+            <a:pPr>
+              <a:defRPr sz="1600"/>
+            </a:pPr>
+            <a:r>
+              <a:t>Regulatory Landscape Analysis</a:t>
+            </a:r>
+          </a:p>
+          <a:p>
+            <a:pPr>
+              <a:defRPr sz="1600"/>
+            </a:pPr>
+            <a:r>
+              <a:t>Competitive Positioning</a:t>
+            </a:r>
+          </a:p>
+          <a:p>
+            <a:pPr>
+              <a:defRPr sz="1600"/>
+            </a:pPr>
+            <a:r>
+              <a:t>Access &amp; Reimbursement Framework</a:t>
+            </a:r>
+          </a:p>
+          <a:p>
+            <a:pPr>
+              <a:defRPr sz="1600"/>
+            </a:pPr>
+            <a:r>
+              <a:t>Strategic Opportunities &amp; Risks</a:t>
+            </a:r>
+          </a:p>
+          <a:p>
+            <a:pPr>
+              <a:defRPr sz="1600"/>
+            </a:pPr>
+            <a:r>
+              <a:t>Recommendations for Market Entry</a:t>
+            </a:r>
+          </a:p>
+        </p:txBody>
+      </p:sp>
+    </p:spTree>
+  </p:cSld>
+  <p:clrMapOvr>
+    <a:masterClrMapping/>
+  </p:clrMapOvr>
+</p:sld>
+</file>
+
+<file path=ppt/slides/slide4.xml><?xml version="1.0" encoding="utf-8"?>
+<p:sld xmlns:a="http://schemas.openxmlformats.org/drawingml/2006/main" xmlns:p="http://schemas.openxmlformats.org/presentationml/2006/main" xmlns:r="http://schemas.openxmlformats.org/officeDocument/2006/relationships">
+  <p:cSld>
+    <p:spTree>
+      <p:nvGrpSpPr>
+        <p:cNvPr id="1" name=""/>
+        <p:cNvGrpSpPr/>
+        <p:nvPr/>
+      </p:nvGrpSpPr>
+      <p:grpSpPr/>
+      <p:sp>
+        <p:nvSpPr>
+          <p:cNvPr id="2" name="Title 1"/>
+          <p:cNvSpPr>
+            <a:spLocks noGrp="1"/>
+          </p:cNvSpPr>
+          <p:nvPr>
+            <p:ph type="title"/>
+          </p:nvPr>
+        </p:nvSpPr>
+        <p:spPr/>
+        <p:txBody>
+          <a:bodyPr/>
+          <a:lstStyle/>
+          <a:p>
+            <a:r>
+              <a:t>European IVD Market: Substantial Opportunity with Complex Structure</a:t>
+            </a:r>
+          </a:p>
+        </p:txBody>
+      </p:sp>
+      <p:sp>
+        <p:nvSpPr>
+          <p:cNvPr id="3" name="Content Placeholder 2"/>
+          <p:cNvSpPr>
+            <a:spLocks noGrp="1"/>
+          </p:cNvSpPr>
+          <p:nvPr>
+            <p:ph idx="1"/>
+          </p:nvPr>
+        </p:nvSpPr>
+        <p:spPr/>
+        <p:txBody>
+          <a:bodyPr/>
+          <a:lstStyle/>
+          <a:p>
+            <a:pPr>
+              <a:defRPr sz="1600" b="1"/>
+            </a:pPr>
+            <a:r>
+              <a:t>Market Size &amp; Structure</a:t>
+            </a:r>
+          </a:p>
+          <a:p>
+            <a:pPr>
+              <a:defRPr sz="1400"/>
+            </a:pPr>
+            <a:r>
+              <a:t>• Germany: €12.9B annual IVD expenditure, 2.6% of total healthcare costs</a:t>
+            </a:r>
+          </a:p>
+          <a:p>
+            <a:pPr>
+              <a:defRPr sz="1400"/>
+            </a:pPr>
+            <a:r>
+              <a:t>• Per capita spending: €150 annually in Germany</a:t>
+            </a:r>
+          </a:p>
+          <a:p>
+            <a:pPr>
+              <a:defRPr sz="1400"/>
+            </a:pPr>
+            <a:r>
+              <a:t>• 55% growth in lab spending (2012-2022) vs 63% overall health expenditure growth</a:t>
+            </a:r>
+          </a:p>
+          <a:p>
+            <a:pPr>
+              <a:defRPr sz="1400"/>
+            </a:pPr>
+            <a:r>
+              <a:t>• Market dominated by large commercial laboratory networks</a:t>
+            </a:r>
+          </a:p>
+          <a:p>
+            <a:pPr>
+              <a:defRPr sz="1600" b="1"/>
+            </a:pPr>
+            <a:r>
+              <a:t>Key Market Trends</a:t>
+            </a:r>
+          </a:p>
+          <a:p>
+            <a:pPr>
+              <a:defRPr sz="1400"/>
+            </a:pPr>
+            <a:r>
+              <a:t>• Consolidation: Under 20% of clinics maintain own laboratory infrastructure</a:t>
+            </a:r>
+          </a:p>
+          <a:p>
+            <a:pPr>
+              <a:defRPr sz="1400"/>
+            </a:pPr>
+            <a:r>
+              <a:t>• POCT growth driven by technical personnel shortages and infrastructure decline</a:t>
+            </a:r>
+          </a:p>
+          <a:p>
+            <a:pPr>
+              <a:defRPr sz="1400"/>
+            </a:pPr>
+            <a:r>
+              <a:t>• Therapeutic Drug Monitoring emerging as growth area</a:t>
+            </a:r>
+          </a:p>
+        </p:txBody>
+      </p:sp>
+      <p:sp>
+        <p:nvSpPr>
+          <p:cNvPr id="4" name="TextBox 3"/>
           <p:cNvSpPr txBox="1"/>
           <p:nvPr/>
         </p:nvSpPr>
         <p:spPr>
           <a:xfrm>
-            <a:off x="640080" y="1005840"/>
-            <a:ext cx="8229600" cy="4572000"/>
+            <a:off x="457200" y="5943600"/>
+            <a:ext cx="8229600" cy="914400"/>
           </a:xfrm>
           <a:prstGeom prst="rect">
             <a:avLst/>
@@ -3252,137 +4562,1287 @@
           <a:noFill/>
         </p:spPr>
         <p:txBody>
-          <a:bodyPr wrap="square" bIns="0" lIns="0" rIns="0" tIns="0">
+          <a:bodyPr wrap="none">
             <a:spAutoFit/>
           </a:bodyPr>
           <a:lstStyle/>
+          <a:p>
+            <a:pPr>
+              <a:defRPr sz="800">
+                <a:solidFill>
+                  <a:srgbClr val="646464"/>
+                </a:solidFill>
+              </a:defRPr>
+            </a:pPr>
+            <a:r>
+              <a:t>[1] https://journals.publisso.de/en/journals/gms/volume23/000337</a:t>
+            </a:r>
+          </a:p>
+        </p:txBody>
+      </p:sp>
+    </p:spTree>
+  </p:cSld>
+  <p:clrMapOvr>
+    <a:masterClrMapping/>
+  </p:clrMapOvr>
+</p:sld>
+</file>
+
+<file path=ppt/slides/slide5.xml><?xml version="1.0" encoding="utf-8"?>
+<p:sld xmlns:a="http://schemas.openxmlformats.org/drawingml/2006/main" xmlns:p="http://schemas.openxmlformats.org/presentationml/2006/main" xmlns:r="http://schemas.openxmlformats.org/officeDocument/2006/relationships">
+  <p:cSld>
+    <p:spTree>
+      <p:nvGrpSpPr>
+        <p:cNvPr id="1" name=""/>
+        <p:cNvGrpSpPr/>
+        <p:nvPr/>
+      </p:nvGrpSpPr>
+      <p:grpSpPr/>
+      <p:sp>
+        <p:nvSpPr>
+          <p:cNvPr id="2" name="Title 1"/>
+          <p:cNvSpPr>
+            <a:spLocks noGrp="1"/>
+          </p:cNvSpPr>
+          <p:nvPr>
+            <p:ph type="title"/>
+          </p:nvPr>
+        </p:nvSpPr>
+        <p:spPr/>
+        <p:txBody>
+          <a:bodyPr/>
+          <a:lstStyle/>
+          <a:p>
+            <a:r>
+              <a:t>Regulatory Landscape: IVDR Compliance and Geopolitical Barriers</a:t>
+            </a:r>
+          </a:p>
+        </p:txBody>
+      </p:sp>
+      <p:sp>
+        <p:nvSpPr>
+          <p:cNvPr id="3" name="Content Placeholder 2"/>
+          <p:cNvSpPr>
+            <a:spLocks noGrp="1"/>
+          </p:cNvSpPr>
+          <p:nvPr>
+            <p:ph idx="1"/>
+          </p:nvPr>
+        </p:nvSpPr>
+        <p:spPr/>
+        <p:txBody>
+          <a:bodyPr/>
+          <a:lstStyle/>
+          <a:p>
+            <a:pPr>
+              <a:defRPr sz="1600" b="1"/>
+            </a:pPr>
+            <a:r>
+              <a:t>IVDR Transition Challenges</a:t>
+            </a:r>
+          </a:p>
+          <a:p>
+            <a:pPr>
+              <a:defRPr sz="1400"/>
+            </a:pPr>
+            <a:r>
+              <a:t>• Transition to IVDR extended to 2027-2028 with stricter compliance requirements</a:t>
+            </a:r>
+          </a:p>
+          <a:p>
+            <a:pPr>
+              <a:defRPr sz="1400"/>
+            </a:pPr>
+            <a:r>
+              <a:t>• Certification process lengthened by 6-12 months, forcing out 30%+ of SMEs</a:t>
+            </a:r>
+          </a:p>
+          <a:p>
+            <a:pPr>
+              <a:defRPr sz="1400"/>
+            </a:pPr>
+            <a:r>
+              <a:t>• Environmental regulations (REACH) add compliance complexity for reagents</a:t>
+            </a:r>
+          </a:p>
+          <a:p>
+            <a:pPr>
+              <a:defRPr sz="1600" b="1"/>
+            </a:pPr>
+            <a:r>
+              <a:t>International Procurement Instrument (IPI)</a:t>
+            </a:r>
+          </a:p>
+          <a:p>
+            <a:pPr>
+              <a:defRPr sz="1400"/>
+            </a:pPr>
+            <a:r>
+              <a:t>• Effective June 2025: Bans Chinese companies from public contracts &gt;€5M</a:t>
+            </a:r>
+          </a:p>
+          <a:p>
+            <a:pPr>
+              <a:defRPr sz="1400"/>
+            </a:pPr>
+            <a:r>
+              <a:t>• Limits Chinese component usage to 50% maximum in successful bids</a:t>
+            </a:r>
+          </a:p>
+          <a:p>
+            <a:pPr>
+              <a:defRPr sz="1400"/>
+            </a:pPr>
+            <a:r>
+              <a:t>• Exceptions only where no alternative suppliers exist</a:t>
+            </a:r>
+          </a:p>
+        </p:txBody>
+      </p:sp>
+      <p:sp>
+        <p:nvSpPr>
+          <p:cNvPr id="4" name="TextBox 3"/>
+          <p:cNvSpPr txBox="1"/>
+          <p:nvPr/>
+        </p:nvSpPr>
+        <p:spPr>
+          <a:xfrm>
+            <a:off x="457200" y="5943600"/>
+            <a:ext cx="8229600" cy="914400"/>
+          </a:xfrm>
+          <a:prstGeom prst="rect">
+            <a:avLst/>
+          </a:prstGeom>
+          <a:noFill/>
+        </p:spPr>
+        <p:txBody>
+          <a:bodyPr wrap="none">
+            <a:spAutoFit/>
+          </a:bodyPr>
+          <a:lstStyle/>
+          <a:p>
+            <a:pPr>
+              <a:defRPr sz="800">
+                <a:solidFill>
+                  <a:srgbClr val="646464"/>
+                </a:solidFill>
+              </a:defRPr>
+            </a:pPr>
+            <a:r>
+              <a:t>[1] https://drive.google.com/file/d/1zt3vNjOlugypsvPkywduyWNRPGTHrsoj/view?usp=drive_link [2] https://ec.europa.eu/commission/presscorner/detail/en/ip_25_1569</a:t>
+            </a:r>
+          </a:p>
+        </p:txBody>
+      </p:sp>
+    </p:spTree>
+  </p:cSld>
+  <p:clrMapOvr>
+    <a:masterClrMapping/>
+  </p:clrMapOvr>
+</p:sld>
+</file>
+
+<file path=ppt/slides/slide6.xml><?xml version="1.0" encoding="utf-8"?>
+<p:sld xmlns:a="http://schemas.openxmlformats.org/drawingml/2006/main" xmlns:p="http://schemas.openxmlformats.org/presentationml/2006/main" xmlns:r="http://schemas.openxmlformats.org/officeDocument/2006/relationships">
+  <p:cSld>
+    <p:spTree>
+      <p:nvGrpSpPr>
+        <p:cNvPr id="1" name=""/>
+        <p:cNvGrpSpPr/>
+        <p:nvPr/>
+      </p:nvGrpSpPr>
+      <p:grpSpPr/>
+      <p:sp>
+        <p:nvSpPr>
+          <p:cNvPr id="2" name="Title 1"/>
+          <p:cNvSpPr>
+            <a:spLocks noGrp="1"/>
+          </p:cNvSpPr>
+          <p:nvPr>
+            <p:ph type="title"/>
+          </p:nvPr>
+        </p:nvSpPr>
+        <p:spPr/>
+        <p:txBody>
+          <a:bodyPr/>
+          <a:lstStyle/>
+          <a:p>
+            <a:r>
+              <a:t>Competitive Landscape: Chinese Suppliers Gaining Traction</a:t>
+            </a:r>
+          </a:p>
+        </p:txBody>
+      </p:sp>
+      <p:sp>
+        <p:nvSpPr>
+          <p:cNvPr id="3" name="Content Placeholder 2"/>
+          <p:cNvSpPr>
+            <a:spLocks noGrp="1"/>
+          </p:cNvSpPr>
+          <p:nvPr>
+            <p:ph idx="1"/>
+          </p:nvPr>
+        </p:nvSpPr>
+        <p:spPr/>
+        <p:txBody>
+          <a:bodyPr/>
+          <a:lstStyle/>
           <a:p/>
-          <a:p>
-            <a:pPr algn="l">
-              <a:spcBef>
-                <a:spcPts val="300"/>
-              </a:spcBef>
-              <a:spcAft>
-                <a:spcPts val="300"/>
-              </a:spcAft>
-              <a:defRPr sz="1400">
-                <a:latin typeface="Calibri"/>
+        </p:txBody>
+      </p:sp>
+      <p:graphicFrame>
+        <p:nvGraphicFramePr>
+          <p:cNvPr id="4" name="Table 3"/>
+          <p:cNvGraphicFramePr>
+            <a:graphicFrameLocks noGrp="1"/>
+          </p:cNvGraphicFramePr>
+          <p:nvPr/>
+        </p:nvGraphicFramePr>
+        <p:xfrm>
+          <a:off x="457200" y="1371600"/>
+          <a:ext cx="8229600" cy="3657600"/>
+        </p:xfrm>
+        <a:graphic>
+          <a:graphicData uri="http://schemas.openxmlformats.org/drawingml/2006/table">
+            <a:tbl>
+              <a:tblPr firstRow="1" bandRow="1">
+                <a:tableStyleId>{5C22544A-7EE6-4342-B048-85BDC9FD1C3A}</a:tableStyleId>
+              </a:tblPr>
+              <a:tblGrid>
+                <a:gridCol w="1828800"/>
+                <a:gridCol w="1828800"/>
+                <a:gridCol w="2286000"/>
+                <a:gridCol w="2286000"/>
+              </a:tblGrid>
+              <a:tr h="731520">
+                <a:tc>
+                  <a:txBody>
+                    <a:bodyPr/>
+                    <a:lstStyle/>
+                    <a:p>
+                      <a:pPr algn="l">
+                        <a:defRPr sz="1000"/>
+                      </a:pPr>
+                      <a:r>
+                        <a:t>Company</a:t>
+                      </a:r>
+                    </a:p>
+                  </a:txBody>
+                  <a:tcPr/>
+                </a:tc>
+                <a:tc>
+                  <a:txBody>
+                    <a:bodyPr/>
+                    <a:lstStyle/>
+                    <a:p>
+                      <a:pPr algn="l">
+                        <a:defRPr sz="1000"/>
+                      </a:pPr>
+                      <a:r>
+                        <a:t>Regulatory Progress</a:t>
+                      </a:r>
+                    </a:p>
+                  </a:txBody>
+                  <a:tcPr/>
+                </a:tc>
+                <a:tc>
+                  <a:txBody>
+                    <a:bodyPr/>
+                    <a:lstStyle/>
+                    <a:p>
+                      <a:pPr algn="l">
+                        <a:defRPr sz="1000"/>
+                      </a:pPr>
+                      <a:r>
+                        <a:t>Financial Strength</a:t>
+                      </a:r>
+                    </a:p>
+                  </a:txBody>
+                  <a:tcPr/>
+                </a:tc>
+                <a:tc>
+                  <a:txBody>
+                    <a:bodyPr/>
+                    <a:lstStyle/>
+                    <a:p>
+                      <a:pPr algn="l">
+                        <a:defRPr sz="1000"/>
+                      </a:pPr>
+                      <a:r>
+                        <a:t>Market Strategy</a:t>
+                      </a:r>
+                    </a:p>
+                  </a:txBody>
+                  <a:tcPr/>
+                </a:tc>
+              </a:tr>
+              <a:tr h="731520">
+                <a:tc>
+                  <a:txBody>
+                    <a:bodyPr/>
+                    <a:lstStyle/>
+                    <a:p>
+                      <a:pPr algn="l">
+                        <a:defRPr sz="1000"/>
+                      </a:pPr>
+                      <a:r>
+                        <a:t>Mindray</a:t>
+                      </a:r>
+                    </a:p>
+                  </a:txBody>
+                  <a:tcPr/>
+                </a:tc>
+                <a:tc>
+                  <a:txBody>
+                    <a:bodyPr/>
+                    <a:lstStyle/>
+                    <a:p>
+                      <a:pPr algn="l">
+                        <a:defRPr sz="1000"/>
+                      </a:pPr>
+                      <a:r>
+                        <a:t>IVDR certified, HyTest acquisition</a:t>
+                      </a:r>
+                    </a:p>
+                  </a:txBody>
+                  <a:tcPr/>
+                </a:tc>
+                <a:tc>
+                  <a:txBody>
+                    <a:bodyPr/>
+                    <a:lstStyle/>
+                    <a:p>
+                      <a:pPr algn="l">
+                        <a:defRPr sz="1000"/>
+                      </a:pPr>
+                      <a:r>
+                        <a:t>11.58B CNY net profit (2023)</a:t>
+                      </a:r>
+                    </a:p>
+                  </a:txBody>
+                  <a:tcPr/>
+                </a:tc>
+                <a:tc>
+                  <a:txBody>
+                    <a:bodyPr/>
+                    <a:lstStyle/>
+                    <a:p>
+                      <a:pPr algn="l">
+                        <a:defRPr sz="1000"/>
+                      </a:pPr>
+                      <a:r>
+                        <a:t>Localization via acquisitions</a:t>
+                      </a:r>
+                    </a:p>
+                  </a:txBody>
+                  <a:tcPr/>
+                </a:tc>
+              </a:tr>
+              <a:tr h="731520">
+                <a:tc>
+                  <a:txBody>
+                    <a:bodyPr/>
+                    <a:lstStyle/>
+                    <a:p>
+                      <a:pPr algn="l">
+                        <a:defRPr sz="1000"/>
+                      </a:pPr>
+                      <a:r>
+                        <a:t>Snibe</a:t>
+                      </a:r>
+                    </a:p>
+                  </a:txBody>
+                  <a:tcPr/>
+                </a:tc>
+                <a:tc>
+                  <a:txBody>
+                    <a:bodyPr/>
+                    <a:lstStyle/>
+                    <a:p>
+                      <a:pPr algn="l">
+                        <a:defRPr sz="1000"/>
+                      </a:pPr>
+                      <a:r>
+                        <a:t>211 chemiluminescence IVDR certificates</a:t>
+                      </a:r>
+                    </a:p>
+                  </a:txBody>
+                  <a:tcPr/>
+                </a:tc>
+                <a:tc>
+                  <a:txBody>
+                    <a:bodyPr/>
+                    <a:lstStyle/>
+                    <a:p>
+                      <a:pPr algn="l">
+                        <a:defRPr sz="1000"/>
+                      </a:pPr>
+                      <a:r>
+                        <a:t>16.62% revenue growth (Q1 2024)</a:t>
+                      </a:r>
+                    </a:p>
+                  </a:txBody>
+                  <a:tcPr/>
+                </a:tc>
+                <a:tc>
+                  <a:txBody>
+                    <a:bodyPr/>
+                    <a:lstStyle/>
+                    <a:p>
+                      <a:pPr algn="l">
+                        <a:defRPr sz="1000"/>
+                      </a:pPr>
+                      <a:r>
+                        <a:t>Distributor network in 18 countries</a:t>
+                      </a:r>
+                    </a:p>
+                  </a:txBody>
+                  <a:tcPr/>
+                </a:tc>
+              </a:tr>
+              <a:tr h="731520">
+                <a:tc>
+                  <a:txBody>
+                    <a:bodyPr/>
+                    <a:lstStyle/>
+                    <a:p>
+                      <a:pPr algn="l">
+                        <a:defRPr sz="1000"/>
+                      </a:pPr>
+                      <a:r>
+                        <a:t>Autobio</a:t>
+                      </a:r>
+                    </a:p>
+                  </a:txBody>
+                  <a:tcPr/>
+                </a:tc>
+                <a:tc>
+                  <a:txBody>
+                    <a:bodyPr/>
+                    <a:lstStyle/>
+                    <a:p>
+                      <a:pPr algn="l">
+                        <a:defRPr sz="1000"/>
+                      </a:pPr>
+                      <a:r>
+                        <a:t>IVDR certified, Sekisui partnership</a:t>
+                      </a:r>
+                    </a:p>
+                  </a:txBody>
+                  <a:tcPr/>
+                </a:tc>
+                <a:tc>
+                  <a:txBody>
+                    <a:bodyPr/>
+                    <a:lstStyle/>
+                    <a:p>
+                      <a:pPr algn="l">
+                        <a:defRPr sz="1000"/>
+                      </a:pPr>
+                      <a:r>
+                        <a:t>Positive net profit growth</a:t>
+                      </a:r>
+                    </a:p>
+                  </a:txBody>
+                  <a:tcPr/>
+                </a:tc>
+                <a:tc>
+                  <a:txBody>
+                    <a:bodyPr/>
+                    <a:lstStyle/>
+                    <a:p>
+                      <a:pPr algn="l">
+                        <a:defRPr sz="1000"/>
+                      </a:pPr>
+                      <a:r>
+                        <a:t>Strategic partnerships</a:t>
+                      </a:r>
+                    </a:p>
+                  </a:txBody>
+                  <a:tcPr/>
+                </a:tc>
+              </a:tr>
+              <a:tr h="731520">
+                <a:tc>
+                  <a:txBody>
+                    <a:bodyPr/>
+                    <a:lstStyle/>
+                    <a:p>
+                      <a:pPr algn="l">
+                        <a:defRPr sz="1000"/>
+                      </a:pPr>
+                      <a:r>
+                        <a:t>Wondfo</a:t>
+                      </a:r>
+                    </a:p>
+                  </a:txBody>
+                  <a:tcPr/>
+                </a:tc>
+                <a:tc>
+                  <a:txBody>
+                    <a:bodyPr/>
+                    <a:lstStyle/>
+                    <a:p>
+                      <a:pPr algn="l">
+                        <a:defRPr sz="1000"/>
+                      </a:pPr>
+                      <a:r>
+                        <a:t>IVDR QMS certified, 150+ countries</a:t>
+                      </a:r>
+                    </a:p>
+                  </a:txBody>
+                  <a:tcPr/>
+                </a:tc>
+                <a:tc>
+                  <a:txBody>
+                    <a:bodyPr/>
+                    <a:lstStyle/>
+                    <a:p>
+                      <a:pPr algn="l">
+                        <a:defRPr sz="1000"/>
+                      </a:pPr>
+                      <a:r>
+                        <a:t>Global manufacturing footprint</a:t>
+                      </a:r>
+                    </a:p>
+                  </a:txBody>
+                  <a:tcPr/>
+                </a:tc>
+                <a:tc>
+                  <a:txBody>
+                    <a:bodyPr/>
+                    <a:lstStyle/>
+                    <a:p>
+                      <a:pPr algn="l">
+                        <a:defRPr sz="1000"/>
+                      </a:pPr>
+                      <a:r>
+                        <a:t>POCT focus, acquisitions</a:t>
+                      </a:r>
+                    </a:p>
+                  </a:txBody>
+                  <a:tcPr/>
+                </a:tc>
+              </a:tr>
+            </a:tbl>
+          </a:graphicData>
+        </a:graphic>
+      </p:graphicFrame>
+      <p:sp>
+        <p:nvSpPr>
+          <p:cNvPr id="5" name="TextBox 4"/>
+          <p:cNvSpPr txBox="1"/>
+          <p:nvPr/>
+        </p:nvSpPr>
+        <p:spPr>
+          <a:xfrm>
+            <a:off x="457200" y="5486400"/>
+            <a:ext cx="8229600" cy="914400"/>
+          </a:xfrm>
+          <a:prstGeom prst="rect">
+            <a:avLst/>
+          </a:prstGeom>
+          <a:noFill/>
+        </p:spPr>
+        <p:txBody>
+          <a:bodyPr wrap="none">
+            <a:spAutoFit/>
+          </a:bodyPr>
+          <a:lstStyle/>
+          <a:p>
+            <a:pPr>
+              <a:defRPr sz="800">
+                <a:solidFill>
+                  <a:srgbClr val="646464"/>
+                </a:solidFill>
               </a:defRPr>
             </a:pPr>
             <a:r>
-              <a:t>Geography: EU coverage includes France, Germany, United Kingdom, Netherlands, Belgium, Switzerland, Greece, Hungary, Turkey, Norway, Iceland, Liechtenstein, Russia; Hungary and Greece act as entry gateways.</a:t>
-            </a:r>
-          </a:p>
-          <a:p>
-            <a:pPr algn="l">
-              <a:spcBef>
-                <a:spcPts val="300"/>
-              </a:spcBef>
-              <a:spcAft>
-                <a:spcPts val="300"/>
-              </a:spcAft>
-              <a:defRPr sz="1400">
-                <a:latin typeface="Calibri"/>
+              <a:t>[1] https://en.caclp.com/industry-news/3530.html [2] https://en.caclp.com/industry-news/2785.html [3] https://en.caclp.com/industry-news/3349.html</a:t>
+            </a:r>
+          </a:p>
+        </p:txBody>
+      </p:sp>
+    </p:spTree>
+  </p:cSld>
+  <p:clrMapOvr>
+    <a:masterClrMapping/>
+  </p:clrMapOvr>
+</p:sld>
+</file>
+
+<file path=ppt/slides/slide7.xml><?xml version="1.0" encoding="utf-8"?>
+<p:sld xmlns:a="http://schemas.openxmlformats.org/drawingml/2006/main" xmlns:p="http://schemas.openxmlformats.org/presentationml/2006/main" xmlns:r="http://schemas.openxmlformats.org/officeDocument/2006/relationships">
+  <p:cSld>
+    <p:spTree>
+      <p:nvGrpSpPr>
+        <p:cNvPr id="1" name=""/>
+        <p:cNvGrpSpPr/>
+        <p:nvPr/>
+      </p:nvGrpSpPr>
+      <p:grpSpPr/>
+      <p:sp>
+        <p:nvSpPr>
+          <p:cNvPr id="2" name="Title 1"/>
+          <p:cNvSpPr>
+            <a:spLocks noGrp="1"/>
+          </p:cNvSpPr>
+          <p:nvPr>
+            <p:ph type="title"/>
+          </p:nvPr>
+        </p:nvSpPr>
+        <p:spPr/>
+        <p:txBody>
+          <a:bodyPr/>
+          <a:lstStyle/>
+          <a:p>
+            <a:r>
+              <a:t>Product Registration Gap: Chinese Suppliers vs Global Leaders</a:t>
+            </a:r>
+          </a:p>
+        </p:txBody>
+      </p:sp>
+      <p:sp>
+        <p:nvSpPr>
+          <p:cNvPr id="3" name="Content Placeholder 2"/>
+          <p:cNvSpPr>
+            <a:spLocks noGrp="1"/>
+          </p:cNvSpPr>
+          <p:nvPr>
+            <p:ph idx="1"/>
+          </p:nvPr>
+        </p:nvSpPr>
+        <p:spPr/>
+        <p:txBody>
+          <a:bodyPr/>
+          <a:lstStyle/>
+          <a:p/>
+        </p:txBody>
+      </p:sp>
+      <p:pic>
+        <p:nvPicPr>
+          <p:cNvPr id="4" name="Picture 3" descr="image.png"/>
+          <p:cNvPicPr>
+            <a:picLocks noChangeAspect="1"/>
+          </p:cNvPicPr>
+          <p:nvPr/>
+        </p:nvPicPr>
+        <p:blipFill>
+          <a:blip r:embed="rId2"/>
+          <a:stretch>
+            <a:fillRect/>
+          </a:stretch>
+        </p:blipFill>
+        <p:spPr>
+          <a:xfrm>
+            <a:off x="914400" y="1371600"/>
+            <a:ext cx="7315200" cy="4572000"/>
+          </a:xfrm>
+          <a:prstGeom prst="rect">
+            <a:avLst/>
+          </a:prstGeom>
+        </p:spPr>
+      </p:pic>
+      <p:sp>
+        <p:nvSpPr>
+          <p:cNvPr id="5" name="TextBox 4"/>
+          <p:cNvSpPr txBox="1"/>
+          <p:nvPr/>
+        </p:nvSpPr>
+        <p:spPr>
+          <a:xfrm>
+            <a:off x="457200" y="5943600"/>
+            <a:ext cx="8229600" cy="914400"/>
+          </a:xfrm>
+          <a:prstGeom prst="rect">
+            <a:avLst/>
+          </a:prstGeom>
+          <a:noFill/>
+        </p:spPr>
+        <p:txBody>
+          <a:bodyPr wrap="none">
+            <a:spAutoFit/>
+          </a:bodyPr>
+          <a:lstStyle/>
+          <a:p>
+            <a:pPr>
+              <a:defRPr sz="800">
+                <a:solidFill>
+                  <a:srgbClr val="646464"/>
+                </a:solidFill>
               </a:defRPr>
             </a:pPr>
             <a:r>
-              <a:t>Companies: Chinese IVD players – Mindray, Snibe, Andon Health, United Imaging, Edan Instruments, Wego, Yuwell, Lepu Medical, Autobio, Fapon Biotech, Vazyme, BGI, Novogene, Jincheng Pharma, Orient Gene, Hotgen Biotech, All Test, HyTest (acquired by Mindray), DiaSys (acquired by Mindray).</a:t>
-            </a:r>
-          </a:p>
-          <a:p>
-            <a:pPr algn="l">
-              <a:spcBef>
-                <a:spcPts val="300"/>
-              </a:spcBef>
-              <a:spcAft>
-                <a:spcPts val="300"/>
-              </a:spcAft>
-              <a:defRPr sz="1400">
-                <a:latin typeface="Calibri"/>
+              <a:t>[1] https://en.caclp.com/industry-news/2365.html</a:t>
+            </a:r>
+          </a:p>
+        </p:txBody>
+      </p:sp>
+    </p:spTree>
+  </p:cSld>
+  <p:clrMapOvr>
+    <a:masterClrMapping/>
+  </p:clrMapOvr>
+</p:sld>
+</file>
+
+<file path=ppt/slides/slide8.xml><?xml version="1.0" encoding="utf-8"?>
+<p:sld xmlns:a="http://schemas.openxmlformats.org/drawingml/2006/main" xmlns:p="http://schemas.openxmlformats.org/presentationml/2006/main" xmlns:r="http://schemas.openxmlformats.org/officeDocument/2006/relationships">
+  <p:cSld>
+    <p:spTree>
+      <p:nvGrpSpPr>
+        <p:cNvPr id="1" name=""/>
+        <p:cNvGrpSpPr/>
+        <p:nvPr/>
+      </p:nvGrpSpPr>
+      <p:grpSpPr/>
+      <p:sp>
+        <p:nvSpPr>
+          <p:cNvPr id="2" name="Title 1"/>
+          <p:cNvSpPr>
+            <a:spLocks noGrp="1"/>
+          </p:cNvSpPr>
+          <p:nvPr>
+            <p:ph type="title"/>
+          </p:nvPr>
+        </p:nvSpPr>
+        <p:spPr/>
+        <p:txBody>
+          <a:bodyPr/>
+          <a:lstStyle/>
+          <a:p>
+            <a:r>
+              <a:t>Access &amp; Reimbursement: Fragmented European Landscape</a:t>
+            </a:r>
+          </a:p>
+        </p:txBody>
+      </p:sp>
+      <p:sp>
+        <p:nvSpPr>
+          <p:cNvPr id="3" name="Content Placeholder 2"/>
+          <p:cNvSpPr>
+            <a:spLocks noGrp="1"/>
+          </p:cNvSpPr>
+          <p:nvPr>
+            <p:ph idx="1"/>
+          </p:nvPr>
+        </p:nvSpPr>
+        <p:spPr/>
+        <p:txBody>
+          <a:bodyPr/>
+          <a:lstStyle/>
+          <a:p>
+            <a:pPr>
+              <a:defRPr sz="1600" b="1"/>
+            </a:pPr>
+            <a:r>
+              <a:t>Country-Specific Systems</a:t>
+            </a:r>
+          </a:p>
+          <a:p>
+            <a:pPr>
+              <a:defRPr sz="1400"/>
+            </a:pPr>
+            <a:r>
+              <a:t>• Germany: EBM catalog for outpatient, DRG-based for inpatient</a:t>
+            </a:r>
+          </a:p>
+          <a:p>
+            <a:pPr>
+              <a:defRPr sz="1400"/>
+            </a:pPr>
+            <a:r>
+              <a:t>• France: NABM system with innovative LAHN pathway</a:t>
+            </a:r>
+          </a:p>
+          <a:p>
+            <a:pPr>
+              <a:defRPr sz="1400"/>
+            </a:pPr>
+            <a:r>
+              <a:t>• Italy: LEA catalog with defined tariffs</a:t>
+            </a:r>
+          </a:p>
+          <a:p>
+            <a:pPr>
+              <a:defRPr sz="1400"/>
+            </a:pPr>
+            <a:r>
+              <a:t>• Spain: Global budget funding, no dedicated reimbursement</a:t>
+            </a:r>
+          </a:p>
+          <a:p>
+            <a:pPr>
+              <a:defRPr sz="1400"/>
+            </a:pPr>
+            <a:r>
+              <a:t>• UK: NHS Payment Scheme, Medtech Funding Mandate</a:t>
+            </a:r>
+          </a:p>
+          <a:p>
+            <a:pPr>
+              <a:defRPr sz="1600" b="1"/>
+            </a:pPr>
+            <a:r>
+              <a:t>Key Challenges</a:t>
+            </a:r>
+          </a:p>
+          <a:p>
+            <a:pPr>
+              <a:defRPr sz="1400"/>
+            </a:pPr>
+            <a:r>
+              <a:t>• Fixed prices without inflation adjustment (Germany)</a:t>
+            </a:r>
+          </a:p>
+          <a:p>
+            <a:pPr>
+              <a:defRPr sz="1400"/>
+            </a:pPr>
+            <a:r>
+              <a:t>• Manufacturer-triggered reimbursement code creation</a:t>
+            </a:r>
+          </a:p>
+          <a:p>
+            <a:pPr>
+              <a:defRPr sz="1400"/>
+            </a:pPr>
+            <a:r>
+              <a:t>• HTA requirements vary by country and region</a:t>
+            </a:r>
+          </a:p>
+        </p:txBody>
+      </p:sp>
+      <p:sp>
+        <p:nvSpPr>
+          <p:cNvPr id="4" name="TextBox 3"/>
+          <p:cNvSpPr txBox="1"/>
+          <p:nvPr/>
+        </p:nvSpPr>
+        <p:spPr>
+          <a:xfrm>
+            <a:off x="457200" y="5943600"/>
+            <a:ext cx="8229600" cy="914400"/>
+          </a:xfrm>
+          <a:prstGeom prst="rect">
+            <a:avLst/>
+          </a:prstGeom>
+          <a:noFill/>
+        </p:spPr>
+        <p:txBody>
+          <a:bodyPr wrap="none">
+            <a:spAutoFit/>
+          </a:bodyPr>
+          <a:lstStyle/>
+          <a:p>
+            <a:pPr>
+              <a:defRPr sz="800">
+                <a:solidFill>
+                  <a:srgbClr val="646464"/>
+                </a:solidFill>
               </a:defRPr>
             </a:pPr>
             <a:r>
-              <a:t>Access &amp; Reimbursement: EU relies on public‑tender and DRG‑based reimbursement; tiered structure rewards innovative, clinically‑validated diagnostics.</a:t>
-            </a:r>
-          </a:p>
-          <a:p>
-            <a:pPr algn="l">
-              <a:spcBef>
-                <a:spcPts val="300"/>
-              </a:spcBef>
-              <a:spcAft>
-                <a:spcPts val="300"/>
-              </a:spcAft>
-              <a:defRPr sz="1400">
-                <a:latin typeface="Calibri"/>
+              <a:t>[1] https://mtrconsult.com/general-market-access-landscape-vitro-diagnostic-tests-europe [2] https://journals.publisso.de/en/journals/gms/volume23/000337</a:t>
+            </a:r>
+          </a:p>
+        </p:txBody>
+      </p:sp>
+    </p:spTree>
+  </p:cSld>
+  <p:clrMapOvr>
+    <a:masterClrMapping/>
+  </p:clrMapOvr>
+</p:sld>
+</file>
+
+<file path=ppt/slides/slide9.xml><?xml version="1.0" encoding="utf-8"?>
+<p:sld xmlns:a="http://schemas.openxmlformats.org/drawingml/2006/main" xmlns:p="http://schemas.openxmlformats.org/presentationml/2006/main" xmlns:r="http://schemas.openxmlformats.org/officeDocument/2006/relationships">
+  <p:cSld>
+    <p:spTree>
+      <p:nvGrpSpPr>
+        <p:cNvPr id="1" name=""/>
+        <p:cNvGrpSpPr/>
+        <p:nvPr/>
+      </p:nvGrpSpPr>
+      <p:grpSpPr/>
+      <p:sp>
+        <p:nvSpPr>
+          <p:cNvPr id="2" name="Title 1"/>
+          <p:cNvSpPr>
+            <a:spLocks noGrp="1"/>
+          </p:cNvSpPr>
+          <p:nvPr>
+            <p:ph type="title"/>
+          </p:nvPr>
+        </p:nvSpPr>
+        <p:spPr/>
+        <p:txBody>
+          <a:bodyPr/>
+          <a:lstStyle/>
+          <a:p>
+            <a:r>
+              <a:t>Budget Analysis: Cost Pressures Drive Value Seeking</a:t>
+            </a:r>
+          </a:p>
+        </p:txBody>
+      </p:sp>
+      <p:sp>
+        <p:nvSpPr>
+          <p:cNvPr id="3" name="Content Placeholder 2"/>
+          <p:cNvSpPr>
+            <a:spLocks noGrp="1"/>
+          </p:cNvSpPr>
+          <p:nvPr>
+            <p:ph idx="1"/>
+          </p:nvPr>
+        </p:nvSpPr>
+        <p:spPr/>
+        <p:txBody>
+          <a:bodyPr/>
+          <a:lstStyle/>
+        </p:txBody>
+      </p:sp>
+      <p:graphicFrame>
+        <p:nvGraphicFramePr>
+          <p:cNvPr id="4" name="Table 3"/>
+          <p:cNvGraphicFramePr>
+            <a:graphicFrameLocks noGrp="1"/>
+          </p:cNvGraphicFramePr>
+          <p:nvPr/>
+        </p:nvGraphicFramePr>
+        <p:xfrm>
+          <a:off x="457200" y="1371600"/>
+          <a:ext cx="8229600" cy="2743200"/>
+        </p:xfrm>
+        <a:graphic>
+          <a:graphicData uri="http://schemas.openxmlformats.org/drawingml/2006/table">
+            <a:tbl>
+              <a:tblPr firstRow="1" bandRow="1">
+                <a:tableStyleId>{5C22544A-7EE6-4342-B048-85BDC9FD1C3A}</a:tableStyleId>
+              </a:tblPr>
+              <a:tblGrid>
+                <a:gridCol w="2743200"/>
+                <a:gridCol w="2743200"/>
+                <a:gridCol w="2743200"/>
+              </a:tblGrid>
+              <a:tr h="548640">
+                <a:tc>
+                  <a:txBody>
+                    <a:bodyPr/>
+                    <a:lstStyle/>
+                    <a:p>
+                      <a:pPr algn="l">
+                        <a:defRPr sz="1000"/>
+                      </a:pPr>
+                      <a:r>
+                        <a:t>Country</a:t>
+                      </a:r>
+                    </a:p>
+                  </a:txBody>
+                  <a:tcPr/>
+                </a:tc>
+                <a:tc>
+                  <a:txBody>
+                    <a:bodyPr/>
+                    <a:lstStyle/>
+                    <a:p>
+                      <a:pPr algn="l">
+                        <a:defRPr sz="1000"/>
+                      </a:pPr>
+                      <a:r>
+                        <a:t>Funding Mechanism</a:t>
+                      </a:r>
+                    </a:p>
+                  </a:txBody>
+                  <a:tcPr/>
+                </a:tc>
+                <a:tc>
+                  <a:txBody>
+                    <a:bodyPr/>
+                    <a:lstStyle/>
+                    <a:p>
+                      <a:pPr algn="l">
+                        <a:defRPr sz="1000"/>
+                      </a:pPr>
+                      <a:r>
+                        <a:t>Cost Pressure Factors</a:t>
+                      </a:r>
+                    </a:p>
+                  </a:txBody>
+                  <a:tcPr/>
+                </a:tc>
+              </a:tr>
+              <a:tr h="548640">
+                <a:tc>
+                  <a:txBody>
+                    <a:bodyPr/>
+                    <a:lstStyle/>
+                    <a:p>
+                      <a:pPr algn="l">
+                        <a:defRPr sz="1000"/>
+                      </a:pPr>
+                      <a:r>
+                        <a:t>Germany</a:t>
+                      </a:r>
+                    </a:p>
+                  </a:txBody>
+                  <a:tcPr/>
+                </a:tc>
+                <a:tc>
+                  <a:txBody>
+                    <a:bodyPr/>
+                    <a:lstStyle/>
+                    <a:p>
+                      <a:pPr algn="l">
+                        <a:defRPr sz="1000"/>
+                      </a:pPr>
+                      <a:r>
+                        <a:t>Global budgets, DRG-based</a:t>
+                      </a:r>
+                    </a:p>
+                  </a:txBody>
+                  <a:tcPr/>
+                </a:tc>
+                <a:tc>
+                  <a:txBody>
+                    <a:bodyPr/>
+                    <a:lstStyle/>
+                    <a:p>
+                      <a:pPr algn="l">
+                        <a:defRPr sz="1000"/>
+                      </a:pPr>
+                      <a:r>
+                        <a:t>Fixed prices, efficiency bonus</a:t>
+                      </a:r>
+                    </a:p>
+                  </a:txBody>
+                  <a:tcPr/>
+                </a:tc>
+              </a:tr>
+              <a:tr h="548640">
+                <a:tc>
+                  <a:txBody>
+                    <a:bodyPr/>
+                    <a:lstStyle/>
+                    <a:p>
+                      <a:pPr algn="l">
+                        <a:defRPr sz="1000"/>
+                      </a:pPr>
+                      <a:r>
+                        <a:t>France</a:t>
+                      </a:r>
+                    </a:p>
+                  </a:txBody>
+                  <a:tcPr/>
+                </a:tc>
+                <a:tc>
+                  <a:txBody>
+                    <a:bodyPr/>
+                    <a:lstStyle/>
+                    <a:p>
+                      <a:pPr algn="l">
+                        <a:defRPr sz="1000"/>
+                      </a:pPr>
+                      <a:r>
+                        <a:t>NABM with point values</a:t>
+                      </a:r>
+                    </a:p>
+                  </a:txBody>
+                  <a:tcPr/>
+                </a:tc>
+                <a:tc>
+                  <a:txBody>
+                    <a:bodyPr/>
+                    <a:lstStyle/>
+                    <a:p>
+                      <a:pPr algn="l">
+                        <a:defRPr sz="1000"/>
+                      </a:pPr>
+                      <a:r>
+                        <a:t>Innovation funding constraints</a:t>
+                      </a:r>
+                    </a:p>
+                  </a:txBody>
+                  <a:tcPr/>
+                </a:tc>
+              </a:tr>
+              <a:tr h="548640">
+                <a:tc>
+                  <a:txBody>
+                    <a:bodyPr/>
+                    <a:lstStyle/>
+                    <a:p>
+                      <a:pPr algn="l">
+                        <a:defRPr sz="1000"/>
+                      </a:pPr>
+                      <a:r>
+                        <a:t>Spain</a:t>
+                      </a:r>
+                    </a:p>
+                  </a:txBody>
+                  <a:tcPr/>
+                </a:tc>
+                <a:tc>
+                  <a:txBody>
+                    <a:bodyPr/>
+                    <a:lstStyle/>
+                    <a:p>
+                      <a:pPr algn="l">
+                        <a:defRPr sz="1000"/>
+                      </a:pPr>
+                      <a:r>
+                        <a:t>Regional global budgets</a:t>
+                      </a:r>
+                    </a:p>
+                  </a:txBody>
+                  <a:tcPr/>
+                </a:tc>
+                <a:tc>
+                  <a:txBody>
+                    <a:bodyPr/>
+                    <a:lstStyle/>
+                    <a:p>
+                      <a:pPr algn="l">
+                        <a:defRPr sz="1000"/>
+                      </a:pPr>
+                      <a:r>
+                        <a:t>No dedicated reimbursement</a:t>
+                      </a:r>
+                    </a:p>
+                  </a:txBody>
+                  <a:tcPr/>
+                </a:tc>
+              </a:tr>
+              <a:tr h="548640">
+                <a:tc>
+                  <a:txBody>
+                    <a:bodyPr/>
+                    <a:lstStyle/>
+                    <a:p>
+                      <a:pPr algn="l">
+                        <a:defRPr sz="1000"/>
+                      </a:pPr>
+                      <a:r>
+                        <a:t>UK</a:t>
+                      </a:r>
+                    </a:p>
+                  </a:txBody>
+                  <a:tcPr/>
+                </a:tc>
+                <a:tc>
+                  <a:txBody>
+                    <a:bodyPr/>
+                    <a:lstStyle/>
+                    <a:p>
+                      <a:pPr algn="l">
+                        <a:defRPr sz="1000"/>
+                      </a:pPr>
+                      <a:r>
+                        <a:t>NHS Payment Scheme</a:t>
+                      </a:r>
+                    </a:p>
+                  </a:txBody>
+                  <a:tcPr/>
+                </a:tc>
+                <a:tc>
+                  <a:txBody>
+                    <a:bodyPr/>
+                    <a:lstStyle/>
+                    <a:p>
+                      <a:pPr algn="l">
+                        <a:defRPr sz="1000"/>
+                      </a:pPr>
+                      <a:r>
+                        <a:t>Medtech Funding Mandate limits</a:t>
+                      </a:r>
+                    </a:p>
+                  </a:txBody>
+                  <a:tcPr/>
+                </a:tc>
+              </a:tr>
+            </a:tbl>
+          </a:graphicData>
+        </a:graphic>
+      </p:graphicFrame>
+      <p:sp>
+        <p:nvSpPr>
+          <p:cNvPr id="5" name="TextBox 4"/>
+          <p:cNvSpPr txBox="1"/>
+          <p:nvPr/>
+        </p:nvSpPr>
+        <p:spPr>
+          <a:xfrm>
+            <a:off x="457200" y="3657600"/>
+            <a:ext cx="8229600" cy="1371600"/>
+          </a:xfrm>
+          <a:prstGeom prst="rect">
+            <a:avLst/>
+          </a:prstGeom>
+          <a:noFill/>
+        </p:spPr>
+        <p:txBody>
+          <a:bodyPr wrap="none">
+            <a:spAutoFit/>
+          </a:bodyPr>
+          <a:lstStyle/>
+          <a:p>
+            <a:pPr>
+              <a:defRPr sz="1200"/>
+            </a:pPr>
+            <a:r>
+              <a:t>• Laboratories operate under severe cost constraints, creating demand for cost-effective solutions</a:t>
+            </a:r>
+          </a:p>
+          <a:p>
+            <a:pPr>
+              <a:defRPr sz="1200"/>
+            </a:pPr>
+            <a:r>
+              <a:t>• Chinese suppliers must demonstrate significant cost advantages over incumbents</a:t>
+            </a:r>
+          </a:p>
+          <a:p>
+            <a:pPr>
+              <a:defRPr sz="1200"/>
+            </a:pPr>
+            <a:r>
+              <a:t>• Value proposition must align with hospital budget optimization needs</a:t>
+            </a:r>
+          </a:p>
+        </p:txBody>
+      </p:sp>
+      <p:sp>
+        <p:nvSpPr>
+          <p:cNvPr id="6" name="TextBox 5"/>
+          <p:cNvSpPr txBox="1"/>
+          <p:nvPr/>
+        </p:nvSpPr>
+        <p:spPr>
+          <a:xfrm>
+            <a:off x="457200" y="5943600"/>
+            <a:ext cx="8229600" cy="914400"/>
+          </a:xfrm>
+          <a:prstGeom prst="rect">
+            <a:avLst/>
+          </a:prstGeom>
+          <a:noFill/>
+        </p:spPr>
+        <p:txBody>
+          <a:bodyPr wrap="none">
+            <a:spAutoFit/>
+          </a:bodyPr>
+          <a:lstStyle/>
+          <a:p>
+            <a:pPr>
+              <a:defRPr sz="800">
+                <a:solidFill>
+                  <a:srgbClr val="646464"/>
+                </a:solidFill>
               </a:defRPr>
             </a:pPr>
             <a:r>
-              <a:t>Budget: €1.65 trillion total healthcare spend; €3,685 per‑capita expenditure signals large, publicly funded market.</a:t>
-            </a:r>
-          </a:p>
-          <a:p>
-            <a:pPr algn="l">
-              <a:spcBef>
-                <a:spcPts val="300"/>
-              </a:spcBef>
-              <a:spcAft>
-                <a:spcPts val="300"/>
-              </a:spcAft>
-              <a:defRPr sz="1400">
-                <a:latin typeface="Calibri"/>
-              </a:defRPr>
-            </a:pPr>
-            <a:r>
-              <a:t>Regulatory: IVDR/MDR enforcement; certification timelines extended 6‑12 months; transition period now 2027‑2028; REACH adds environmental compliance requirements.</a:t>
-            </a:r>
-          </a:p>
-          <a:p>
-            <a:pPr algn="l">
-              <a:spcBef>
-                <a:spcPts val="300"/>
-              </a:spcBef>
-              <a:spcAft>
-                <a:spcPts val="300"/>
-              </a:spcAft>
-              <a:defRPr sz="1400">
-                <a:latin typeface="Calibri"/>
-              </a:defRPr>
-            </a:pPr>
-            <a:r>
-              <a:t>Customer Receptivity: Strong price sensitivity; brand‑trust deficit for high‑end Chinese IVDs; cost‑effectiveness offers advantage in low‑mid tier segments.</a:t>
-            </a:r>
-          </a:p>
-          <a:p>
-            <a:pPr algn="l">
-              <a:spcBef>
-                <a:spcPts val="300"/>
-              </a:spcBef>
-              <a:spcAft>
-                <a:spcPts val="300"/>
-              </a:spcAft>
-              <a:defRPr sz="1400">
-                <a:latin typeface="Calibri"/>
-              </a:defRPr>
-            </a:pPr>
-            <a:r>
-              <a:t>Strategic Opportunities: M&amp;A to gain local regulatory footholds (DiaSys, HyTest); use gateway markets (Hungary, Greece) for EU‑certified entry; consider local production or JV to address supply‑chain localisation policies.</a:t>
-            </a:r>
-          </a:p>
-          <a:p>
-            <a:pPr algn="l">
-              <a:spcBef>
-                <a:spcPts val="300"/>
-              </a:spcBef>
-              <a:spcAft>
-                <a:spcPts val="300"/>
-              </a:spcAft>
-              <a:defRPr sz="1400">
-                <a:latin typeface="Calibri"/>
-              </a:defRPr>
-            </a:pPr>
-            <a:r>
-              <a:t>Risks/Challenges: Brand perception, longer and cost‑intensive certification, REACH compliance, potential supply‑chain restrictions, data gaps on market share and private‑sector dynamics.</a:t>
+              <a:t>[1] https://mtrconsult.com/general-market-access-landscape-vitro-diagnostic-tests-europe [2] https://journals.publisso.de/en/journals/gms/volume23/000337</a:t>
             </a:r>
           </a:p>
         </p:txBody>
